--- a/넷제로 데이터 랩.pptx
+++ b/넷제로 데이터 랩.pptx
@@ -12204,6 +12204,78 @@
           <a:xfrm>
             <a:off x="7995833" y="1864203"/>
             <a:ext cx="3384423" cy="3492436"/>
+          </a:xfrm>
+          <a:prstGeom prst="rect">
+            <a:avLst/>
+          </a:prstGeom>
+        </p:spPr>
+      </p:pic>
+      <p:pic>
+        <p:nvPicPr>
+          <p:cNvPr id="215" name="그림 214"/>
+          <p:cNvPicPr>
+            <a:picLocks noChangeAspect="1"/>
+          </p:cNvPicPr>
+          <p:nvPr/>
+        </p:nvPicPr>
+        <p:blipFill rotWithShape="1">
+          <a:blip r:embed="rId7"/>
+          <a:stretch>
+            <a:fillRect/>
+          </a:stretch>
+        </p:blipFill>
+        <p:spPr>
+          <a:xfrm>
+            <a:off x="753581" y="3066143"/>
+            <a:ext cx="3189669" cy="2329499"/>
+          </a:xfrm>
+          <a:prstGeom prst="rect">
+            <a:avLst/>
+          </a:prstGeom>
+        </p:spPr>
+      </p:pic>
+      <p:pic>
+        <p:nvPicPr>
+          <p:cNvPr id="216" name="그림 215"/>
+          <p:cNvPicPr>
+            <a:picLocks noChangeAspect="1"/>
+          </p:cNvPicPr>
+          <p:nvPr/>
+        </p:nvPicPr>
+        <p:blipFill rotWithShape="1">
+          <a:blip r:embed="rId8"/>
+          <a:stretch>
+            <a:fillRect/>
+          </a:stretch>
+        </p:blipFill>
+        <p:spPr>
+          <a:xfrm>
+            <a:off x="4407472" y="3085587"/>
+            <a:ext cx="3377054" cy="2418658"/>
+          </a:xfrm>
+          <a:prstGeom prst="rect">
+            <a:avLst/>
+          </a:prstGeom>
+        </p:spPr>
+      </p:pic>
+      <p:pic>
+        <p:nvPicPr>
+          <p:cNvPr id="217" name="그림 216"/>
+          <p:cNvPicPr>
+            <a:picLocks noChangeAspect="1"/>
+          </p:cNvPicPr>
+          <p:nvPr/>
+        </p:nvPicPr>
+        <p:blipFill rotWithShape="1">
+          <a:blip r:embed="rId9"/>
+          <a:stretch>
+            <a:fillRect/>
+          </a:stretch>
+        </p:blipFill>
+        <p:spPr>
+          <a:xfrm>
+            <a:off x="8103054" y="3429000"/>
+            <a:ext cx="3264486" cy="2048615"/>
           </a:xfrm>
           <a:prstGeom prst="rect">
             <a:avLst/>
@@ -14327,7 +14399,7 @@
         </p:nvSpPr>
         <p:spPr>
           <a:xfrm>
-            <a:off x="1047748" y="2520722"/>
+            <a:off x="716443" y="2562135"/>
             <a:ext cx="5680982" cy="2184628"/>
           </a:xfrm>
           <a:prstGeom prst="rect">
@@ -14511,7 +14583,31 @@
                 <a:cs typeface="Noto Sans KR"/>
                 <a:sym typeface="Noto Sans KR"/>
               </a:rPr>
-              <a:t>학생들이 직접 데이터를 생산하고 분석하는 실질적 경험의 부재</a:t>
+              <a:t>학생들이 직접 데이터를 </a:t>
+            </a:r>
+            <a:r>
+              <a:rPr lang="ko-KR" altLang="en-US" sz="1500" b="0" i="0" u="none" strike="noStrike" cap="none">
+                <a:solidFill>
+                  <a:srgbClr val="475569"/>
+                </a:solidFill>
+                <a:latin typeface="Noto Sans KR"/>
+                <a:ea typeface="Noto Sans KR"/>
+                <a:cs typeface="Noto Sans KR"/>
+                <a:sym typeface="Noto Sans KR"/>
+              </a:rPr>
+              <a:t>조사하고</a:t>
+            </a:r>
+            <a:r>
+              <a:rPr lang="en-US" sz="1500" b="0" i="0" u="none" strike="noStrike" cap="none">
+                <a:solidFill>
+                  <a:srgbClr val="475569"/>
+                </a:solidFill>
+                <a:latin typeface="Noto Sans KR"/>
+                <a:ea typeface="Noto Sans KR"/>
+                <a:cs typeface="Noto Sans KR"/>
+                <a:sym typeface="Noto Sans KR"/>
+              </a:rPr>
+              <a:t> 분석하는 실질적 경험의 부재</a:t>
             </a:r>
             <a:endParaRPr lang="en-US" sz="1500" b="0" i="0" u="none" strike="noStrike" cap="none">
               <a:solidFill>
@@ -14599,7 +14695,7 @@
       </p:sp>
       <p:pic>
         <p:nvPicPr>
-          <p:cNvPr id="105" name="그림 104"/>
+          <p:cNvPr id="106" name="그림 105"/>
           <p:cNvPicPr>
             <a:picLocks noChangeAspect="1"/>
           </p:cNvPicPr>
@@ -14613,8 +14709,8 @@
         </p:blipFill>
         <p:spPr>
           <a:xfrm>
-            <a:off x="6926034" y="1947898"/>
-            <a:ext cx="5009066" cy="3631217"/>
+            <a:off x="6096000" y="1956922"/>
+            <a:ext cx="5614837" cy="3523938"/>
           </a:xfrm>
           <a:prstGeom prst="rect">
             <a:avLst/>
@@ -15372,8 +15468,8 @@
         </p:nvSpPr>
         <p:spPr>
           <a:xfrm>
-            <a:off x="6334125" y="3562350"/>
-            <a:ext cx="5191125" cy="914400"/>
+            <a:off x="6334124" y="3562350"/>
+            <a:ext cx="5191125" cy="1095375"/>
           </a:xfrm>
           <a:prstGeom prst="rect">
             <a:avLst/>
@@ -15384,12 +15480,12 @@
           </a:ln>
         </p:spPr>
         <p:txBody>
-          <a:bodyPr anchorCtr="0" anchor="t" bIns="0" lIns="0" spcFirstLastPara="1" rIns="0" wrap="square" tIns="0">
+          <a:bodyPr wrap="square" lIns="0" tIns="0" rIns="0" bIns="0" anchor="t" anchorCtr="0">
             <a:spAutoFit/>
           </a:bodyPr>
           <a:lstStyle/>
           <a:p>
-            <a:pPr indent="0" lvl="0" marL="0" marR="0" rtl="0" algn="l">
+            <a:pPr marL="0" marR="0" lvl="0" indent="0" algn="l" rtl="0">
               <a:lnSpc>
                 <a:spcPct val="160000"/>
               </a:lnSpc>
@@ -15400,9 +15496,10 @@
                 <a:spcPts val="0"/>
               </a:spcAft>
               <a:buNone/>
+              <a:defRPr/>
             </a:pPr>
             <a:r>
-              <a:rPr b="1" i="0" lang="en-US" sz="1500" u="none" cap="none" strike="noStrike">
+              <a:rPr lang="en-US" sz="1500" b="1" i="0" u="none" strike="noStrike" cap="none">
                 <a:solidFill>
                   <a:srgbClr val="475569"/>
                 </a:solidFill>
@@ -15414,7 +15511,7 @@
               <a:t>Big6 정보활용모델</a:t>
             </a:r>
             <a:r>
-              <a:rPr b="0" i="0" lang="en-US" sz="1500" u="none" cap="none" strike="noStrike">
+              <a:rPr lang="en-US" sz="1500" b="0" i="0" u="none" strike="noStrike" cap="none">
                 <a:solidFill>
                   <a:srgbClr val="475569"/>
                 </a:solidFill>
@@ -15426,7 +15523,7 @@
               <a:t>을 웹 플랫폼에 이식하여, 학생들이 데이터 탐정이 되어 기후 위기 데이터를 사냥하고 AI의 도움을 받아 성찰하는 </a:t>
             </a:r>
             <a:r>
-              <a:rPr b="1" i="0" lang="en-US" sz="1500" u="none" cap="none" strike="noStrike">
+              <a:rPr lang="en-US" sz="1500" b="1" i="0" u="none" strike="noStrike" cap="none">
                 <a:solidFill>
                   <a:srgbClr val="475569"/>
                 </a:solidFill>
@@ -15435,10 +15532,22 @@
                 <a:cs typeface="Noto Sans KR"/>
                 <a:sym typeface="Noto Sans KR"/>
               </a:rPr>
-              <a:t>온라인 탐구 전용 스튜디오</a:t>
+              <a:t>온라인 탐구 전용 </a:t>
             </a:r>
             <a:r>
-              <a:rPr b="0" i="0" lang="en-US" sz="1500" u="none" cap="none" strike="noStrike">
+              <a:rPr lang="ko-KR" altLang="en-US" sz="1500" b="1" i="0" u="none" strike="noStrike" cap="none">
+                <a:solidFill>
+                  <a:srgbClr val="475569"/>
+                </a:solidFill>
+                <a:latin typeface="Noto Sans KR"/>
+                <a:ea typeface="Noto Sans KR"/>
+                <a:cs typeface="Noto Sans KR"/>
+                <a:sym typeface="Noto Sans KR"/>
+              </a:rPr>
+              <a:t>플랫폼</a:t>
+            </a:r>
+            <a:r>
+              <a:rPr lang="en-US" sz="1500" b="0" i="0" u="none" strike="noStrike" cap="none">
                 <a:solidFill>
                   <a:srgbClr val="475569"/>
                 </a:solidFill>
@@ -15449,20 +15558,28 @@
               </a:rPr>
               <a:t>입니다.</a:t>
             </a:r>
-            <a:endParaRPr/>
+            <a:endParaRPr lang="en-US" sz="1500" b="0" i="0" u="none" strike="noStrike" cap="none">
+              <a:solidFill>
+                <a:srgbClr val="475569"/>
+              </a:solidFill>
+              <a:latin typeface="Noto Sans KR"/>
+              <a:ea typeface="Noto Sans KR"/>
+              <a:cs typeface="Noto Sans KR"/>
+              <a:sym typeface="Noto Sans KR"/>
+            </a:endParaRPr>
           </a:p>
         </p:txBody>
       </p:sp>
       <p:sp>
         <p:nvSpPr>
-          <p:cNvPr id="130" name="가로 글상자 129"/>
+          <p:cNvPr id="131" name="가로 글상자 130"/>
           <p:cNvSpPr txBox="1"/>
           <p:nvPr/>
         </p:nvSpPr>
         <p:spPr>
           <a:xfrm>
-            <a:off x="760866" y="3429000"/>
-            <a:ext cx="4909911" cy="293370"/>
+            <a:off x="876979" y="3678464"/>
+            <a:ext cx="4700362" cy="720181"/>
           </a:xfrm>
           <a:prstGeom prst="rect">
             <a:avLst/>
@@ -15477,8 +15594,26 @@
               <a:defRPr/>
             </a:pPr>
             <a:r>
+              <a:rPr lang="en-US" altLang="en-US">
+                <a:hlinkClick r:id="rId4"/>
+              </a:rPr>
+              <a:t>https://ses5848-commits.github.io/netzero/</a:t>
+            </a:r>
+            <a:endParaRPr lang="en-US" altLang="en-US"/>
+          </a:p>
+          <a:p>
+            <a:pPr lvl="0">
+              <a:defRPr/>
+            </a:pPr>
+            <a:endParaRPr lang="en-US" altLang="en-US"/>
+          </a:p>
+          <a:p>
+            <a:pPr lvl="0">
+              <a:defRPr/>
+            </a:pPr>
+            <a:r>
               <a:rPr lang="ko-KR" altLang="en-US"/>
-              <a:t>링크 입력</a:t>
+              <a:t>링크</a:t>
             </a:r>
             <a:endParaRPr lang="ko-KR" altLang="en-US"/>
           </a:p>
@@ -15493,18 +15628,18 @@
 </file>
 
 <file path=ppt/slides/slide5.xml><?xml version="1.0" encoding="utf-8"?>
-<p:sld xmlns:a="http://schemas.openxmlformats.org/drawingml/2006/main" xmlns:r="http://schemas.openxmlformats.org/officeDocument/2006/relationships" xmlns:mc="http://schemas.openxmlformats.org/markup-compatibility/2006" xmlns:mv="urn:schemas-microsoft-com:mac:vml" xmlns:p="http://schemas.openxmlformats.org/presentationml/2006/main" xmlns:c="http://schemas.openxmlformats.org/drawingml/2006/chart" xmlns:dgm="http://schemas.openxmlformats.org/drawingml/2006/diagram" xmlns:o="urn:schemas-microsoft-com:office:office" xmlns:v="urn:schemas-microsoft-com:vml" xmlns:pvml="urn:schemas-microsoft-com:office:powerpoint" xmlns:com="http://schemas.openxmlformats.org/drawingml/2006/compatibility" xmlns:p14="http://schemas.microsoft.com/office/powerpoint/2010/main" xmlns:p15="http://schemas.microsoft.com/office/powerpoint/2012/main" xmlns:ahyp="http://schemas.microsoft.com/office/drawing/2018/hyperlinkcolor">
+<p:sld xmlns:r="http://schemas.openxmlformats.org/officeDocument/2006/relationships" xmlns:c="http://schemas.openxmlformats.org/drawingml/2006/chart" xmlns:a="http://schemas.openxmlformats.org/drawingml/2006/main" xmlns:dgm="http://schemas.openxmlformats.org/drawingml/2006/diagram" xmlns:dsp="http://schemas.microsoft.com/office/drawing/2008/diagram" xmlns:p="http://schemas.openxmlformats.org/presentationml/2006/main">
   <p:cSld>
     <p:bg>
-      <p:bgPr>
+      <p:bgPr shadeToTitle="0">
         <a:solidFill>
-          <a:srgbClr val="FFFFFF"/>
+          <a:srgbClr val="ffffff"/>
         </a:solidFill>
       </p:bgPr>
     </p:bg>
     <p:spTree>
       <p:nvGrpSpPr>
-        <p:cNvPr id="133" name="Shape 133"/>
+        <p:cNvPr id="1" name=""/>
         <p:cNvGrpSpPr/>
         <p:nvPr/>
       </p:nvGrpSpPr>
@@ -16066,8 +16201,8 @@
         </p:nvSpPr>
         <p:spPr>
           <a:xfrm>
-            <a:off x="8359675" y="3305175"/>
-            <a:ext cx="2870299" cy="609600"/>
+            <a:off x="8246280" y="3305175"/>
+            <a:ext cx="3119766" cy="361950"/>
           </a:xfrm>
           <a:prstGeom prst="rect">
             <a:avLst/>
@@ -16078,12 +16213,12 @@
           </a:ln>
         </p:spPr>
         <p:txBody>
-          <a:bodyPr anchorCtr="0" anchor="t" bIns="0" lIns="0" spcFirstLastPara="1" rIns="0" wrap="square" tIns="0">
+          <a:bodyPr wrap="square" lIns="0" tIns="0" rIns="0" bIns="0" anchor="t" anchorCtr="0">
             <a:spAutoFit/>
           </a:bodyPr>
           <a:lstStyle/>
           <a:p>
-            <a:pPr indent="0" lvl="0" marL="0" marR="0" rtl="0" algn="ctr">
+            <a:pPr marL="0" marR="0" lvl="0" indent="0" algn="ctr" rtl="0">
               <a:lnSpc>
                 <a:spcPct val="160000"/>
               </a:lnSpc>
@@ -16094,9 +16229,10 @@
                 <a:spcPts val="0"/>
               </a:spcAft>
               <a:buNone/>
+              <a:defRPr/>
             </a:pPr>
             <a:r>
-              <a:rPr b="0" i="0" lang="en-US" sz="1500" u="none" cap="none" strike="noStrike">
+              <a:rPr lang="en-US" sz="1500" b="0" i="0" u="none" strike="noStrike" cap="none">
                 <a:solidFill>
                   <a:srgbClr val="475569"/>
                 </a:solidFill>
@@ -17467,18 +17603,18 @@
 </file>
 
 <file path=ppt/slides/slide9.xml><?xml version="1.0" encoding="utf-8"?>
-<p:sld xmlns:a="http://schemas.openxmlformats.org/drawingml/2006/main" xmlns:r="http://schemas.openxmlformats.org/officeDocument/2006/relationships" xmlns:mc="http://schemas.openxmlformats.org/markup-compatibility/2006" xmlns:mv="urn:schemas-microsoft-com:mac:vml" xmlns:p="http://schemas.openxmlformats.org/presentationml/2006/main" xmlns:c="http://schemas.openxmlformats.org/drawingml/2006/chart" xmlns:dgm="http://schemas.openxmlformats.org/drawingml/2006/diagram" xmlns:o="urn:schemas-microsoft-com:office:office" xmlns:v="urn:schemas-microsoft-com:vml" xmlns:pvml="urn:schemas-microsoft-com:office:powerpoint" xmlns:com="http://schemas.openxmlformats.org/drawingml/2006/compatibility" xmlns:p14="http://schemas.microsoft.com/office/powerpoint/2010/main" xmlns:p15="http://schemas.microsoft.com/office/powerpoint/2012/main" xmlns:ahyp="http://schemas.microsoft.com/office/drawing/2018/hyperlinkcolor">
+<p:sld xmlns:r="http://schemas.openxmlformats.org/officeDocument/2006/relationships" xmlns:c="http://schemas.openxmlformats.org/drawingml/2006/chart" xmlns:a="http://schemas.openxmlformats.org/drawingml/2006/main" xmlns:dgm="http://schemas.openxmlformats.org/drawingml/2006/diagram" xmlns:dsp="http://schemas.microsoft.com/office/drawing/2008/diagram" xmlns:p="http://schemas.openxmlformats.org/presentationml/2006/main">
   <p:cSld>
     <p:bg>
-      <p:bgPr>
+      <p:bgPr shadeToTitle="0">
         <a:solidFill>
-          <a:srgbClr val="FFFFFF"/>
+          <a:srgbClr val="ffffff"/>
         </a:solidFill>
       </p:bgPr>
     </p:bg>
     <p:spTree>
       <p:nvGrpSpPr>
-        <p:cNvPr id="188" name="Shape 188"/>
+        <p:cNvPr id="1" name=""/>
         <p:cNvGrpSpPr/>
         <p:nvPr/>
       </p:nvGrpSpPr>
@@ -17620,65 +17756,6 @@
       </p:sp>
       <p:sp>
         <p:nvSpPr>
-          <p:cNvPr id="192" name="Google Shape;192;p21"/>
-          <p:cNvSpPr/>
-          <p:nvPr/>
-        </p:nvSpPr>
-        <p:spPr>
-          <a:xfrm>
-            <a:off x="666750" y="2905125"/>
-            <a:ext cx="5191125" cy="2009775"/>
-          </a:xfrm>
-          <a:prstGeom prst="roundRect">
-            <a:avLst>
-              <a:gd fmla="val 5687" name="adj"/>
-            </a:avLst>
-          </a:prstGeom>
-          <a:solidFill>
-            <a:srgbClr val="F1F5F9"/>
-          </a:solidFill>
-          <a:ln cap="flat" cmpd="sng" w="19050">
-            <a:solidFill>
-              <a:srgbClr val="CBD5E1"/>
-            </a:solidFill>
-            <a:prstDash val="solid"/>
-            <a:round/>
-            <a:headEnd len="sm" w="sm" type="none"/>
-            <a:tailEnd len="sm" w="sm" type="none"/>
-          </a:ln>
-        </p:spPr>
-        <p:txBody>
-          <a:bodyPr anchorCtr="0" anchor="ctr" bIns="45700" lIns="91425" spcFirstLastPara="1" rIns="91425" wrap="square" tIns="45700">
-            <a:noAutofit/>
-          </a:bodyPr>
-          <a:lstStyle/>
-          <a:p>
-            <a:pPr indent="0" lvl="0" marL="0" marR="0" rtl="0" algn="ctr">
-              <a:spcBef>
-                <a:spcPts val="0"/>
-              </a:spcBef>
-              <a:spcAft>
-                <a:spcPts val="0"/>
-              </a:spcAft>
-              <a:buNone/>
-            </a:pPr>
-            <a:r>
-              <a:t/>
-            </a:r>
-            <a:endParaRPr b="0" i="0" sz="1800" u="none" cap="none" strike="noStrike">
-              <a:solidFill>
-                <a:schemeClr val="dk1"/>
-              </a:solidFill>
-              <a:latin typeface="Calibri"/>
-              <a:ea typeface="Calibri"/>
-              <a:cs typeface="Calibri"/>
-              <a:sym typeface="Calibri"/>
-            </a:endParaRPr>
-          </a:p>
-        </p:txBody>
-      </p:sp>
-      <p:sp>
-        <p:nvSpPr>
           <p:cNvPr id="193" name="Google Shape;193;p21"/>
           <p:cNvSpPr txBox="1"/>
           <p:nvPr/>
@@ -18089,6 +18166,30 @@
           </a:p>
         </p:txBody>
       </p:sp>
+      <p:pic>
+        <p:nvPicPr>
+          <p:cNvPr id="201" name="그림 200"/>
+          <p:cNvPicPr>
+            <a:picLocks noChangeAspect="1"/>
+          </p:cNvPicPr>
+          <p:nvPr/>
+        </p:nvPicPr>
+        <p:blipFill rotWithShape="1">
+          <a:blip r:embed="rId4"/>
+          <a:stretch>
+            <a:fillRect/>
+          </a:stretch>
+        </p:blipFill>
+        <p:spPr>
+          <a:xfrm>
+            <a:off x="419294" y="2065343"/>
+            <a:ext cx="5676705" cy="3463966"/>
+          </a:xfrm>
+          <a:prstGeom prst="rect">
+            <a:avLst/>
+          </a:prstGeom>
+        </p:spPr>
+      </p:pic>
     </p:spTree>
   </p:cSld>
   <p:clrMapOvr>
